--- a/bodytemplates/3 points/2.pptx
+++ b/bodytemplates/3 points/2.pptx
@@ -259,7 +259,7 @@
           <a:p>
             <a:fld id="{5BEFCD8C-FE9B-4A27-A98A-E048A60EE720}" type="datetimeFigureOut">
               <a:rPr lang="en-US" smtClean="0"/>
-              <a:t>7/25/2026</a:t>
+              <a:t>8/2/2026</a:t>
             </a:fld>
             <a:endParaRPr lang="en-US"/>
           </a:p>
@@ -457,7 +457,7 @@
           <a:p>
             <a:fld id="{5BEFCD8C-FE9B-4A27-A98A-E048A60EE720}" type="datetimeFigureOut">
               <a:rPr lang="en-US" smtClean="0"/>
-              <a:t>7/25/2026</a:t>
+              <a:t>8/2/2026</a:t>
             </a:fld>
             <a:endParaRPr lang="en-US"/>
           </a:p>
@@ -665,7 +665,7 @@
           <a:p>
             <a:fld id="{5BEFCD8C-FE9B-4A27-A98A-E048A60EE720}" type="datetimeFigureOut">
               <a:rPr lang="en-US" smtClean="0"/>
-              <a:t>7/25/2026</a:t>
+              <a:t>8/2/2026</a:t>
             </a:fld>
             <a:endParaRPr lang="en-US"/>
           </a:p>
@@ -863,7 +863,7 @@
           <a:p>
             <a:fld id="{5BEFCD8C-FE9B-4A27-A98A-E048A60EE720}" type="datetimeFigureOut">
               <a:rPr lang="en-US" smtClean="0"/>
-              <a:t>7/25/2026</a:t>
+              <a:t>8/2/2026</a:t>
             </a:fld>
             <a:endParaRPr lang="en-US"/>
           </a:p>
@@ -1138,7 +1138,7 @@
           <a:p>
             <a:fld id="{5BEFCD8C-FE9B-4A27-A98A-E048A60EE720}" type="datetimeFigureOut">
               <a:rPr lang="en-US" smtClean="0"/>
-              <a:t>7/25/2026</a:t>
+              <a:t>8/2/2026</a:t>
             </a:fld>
             <a:endParaRPr lang="en-US"/>
           </a:p>
@@ -1403,7 +1403,7 @@
           <a:p>
             <a:fld id="{5BEFCD8C-FE9B-4A27-A98A-E048A60EE720}" type="datetimeFigureOut">
               <a:rPr lang="en-US" smtClean="0"/>
-              <a:t>7/25/2026</a:t>
+              <a:t>8/2/2026</a:t>
             </a:fld>
             <a:endParaRPr lang="en-US"/>
           </a:p>
@@ -1815,7 +1815,7 @@
           <a:p>
             <a:fld id="{5BEFCD8C-FE9B-4A27-A98A-E048A60EE720}" type="datetimeFigureOut">
               <a:rPr lang="en-US" smtClean="0"/>
-              <a:t>7/25/2026</a:t>
+              <a:t>8/2/2026</a:t>
             </a:fld>
             <a:endParaRPr lang="en-US"/>
           </a:p>
@@ -1956,7 +1956,7 @@
           <a:p>
             <a:fld id="{5BEFCD8C-FE9B-4A27-A98A-E048A60EE720}" type="datetimeFigureOut">
               <a:rPr lang="en-US" smtClean="0"/>
-              <a:t>7/25/2026</a:t>
+              <a:t>8/2/2026</a:t>
             </a:fld>
             <a:endParaRPr lang="en-US"/>
           </a:p>
@@ -2069,7 +2069,7 @@
           <a:p>
             <a:fld id="{5BEFCD8C-FE9B-4A27-A98A-E048A60EE720}" type="datetimeFigureOut">
               <a:rPr lang="en-US" smtClean="0"/>
-              <a:t>7/25/2026</a:t>
+              <a:t>8/2/2026</a:t>
             </a:fld>
             <a:endParaRPr lang="en-US"/>
           </a:p>
@@ -2380,7 +2380,7 @@
           <a:p>
             <a:fld id="{5BEFCD8C-FE9B-4A27-A98A-E048A60EE720}" type="datetimeFigureOut">
               <a:rPr lang="en-US" smtClean="0"/>
-              <a:t>7/25/2026</a:t>
+              <a:t>8/2/2026</a:t>
             </a:fld>
             <a:endParaRPr lang="en-US"/>
           </a:p>
@@ -2668,7 +2668,7 @@
           <a:p>
             <a:fld id="{5BEFCD8C-FE9B-4A27-A98A-E048A60EE720}" type="datetimeFigureOut">
               <a:rPr lang="en-US" smtClean="0"/>
-              <a:t>7/25/2026</a:t>
+              <a:t>8/2/2026</a:t>
             </a:fld>
             <a:endParaRPr lang="en-US"/>
           </a:p>
@@ -2909,7 +2909,7 @@
           <a:p>
             <a:fld id="{5BEFCD8C-FE9B-4A27-A98A-E048A60EE720}" type="datetimeFigureOut">
               <a:rPr lang="en-US" smtClean="0"/>
-              <a:t>7/25/2026</a:t>
+              <a:t>8/2/2026</a:t>
             </a:fld>
             <a:endParaRPr lang="en-US"/>
           </a:p>
@@ -3341,7 +3341,7 @@
         <p:spPr>
           <a:xfrm>
             <a:off x="382842" y="2321170"/>
-            <a:ext cx="7843072" cy="646331"/>
+            <a:ext cx="8588880" cy="646331"/>
           </a:xfrm>
           <a:prstGeom prst="rect">
             <a:avLst/>
@@ -3387,7 +3387,7 @@
         <p:spPr>
           <a:xfrm>
             <a:off x="382842" y="1659451"/>
-            <a:ext cx="7266061" cy="646331"/>
+            <a:ext cx="8588880" cy="646331"/>
           </a:xfrm>
           <a:prstGeom prst="rect">
             <a:avLst/>
@@ -3410,7 +3410,171 @@
       </p:sp>
       <p:sp>
         <p:nvSpPr>
-          <p:cNvPr id="4" name="subpoint">
+          <p:cNvPr id="5" name="content2">
+            <a:extLst>
+              <a:ext uri="{FF2B5EF4-FFF2-40B4-BE49-F238E27FC236}">
+                <a16:creationId xmlns:a16="http://schemas.microsoft.com/office/drawing/2014/main" id="{0114294D-3C82-4496-9578-DE3D20CA1765}"/>
+              </a:ext>
+            </a:extLst>
+          </p:cNvPr>
+          <p:cNvSpPr txBox="1"/>
+          <p:nvPr/>
+        </p:nvSpPr>
+        <p:spPr>
+          <a:xfrm>
+            <a:off x="402712" y="3940580"/>
+            <a:ext cx="8569010" cy="646331"/>
+          </a:xfrm>
+          <a:prstGeom prst="rect">
+            <a:avLst/>
+          </a:prstGeom>
+          <a:noFill/>
+          <a:ln>
+            <a:solidFill>
+              <a:schemeClr val="bg1"/>
+            </a:solidFill>
+          </a:ln>
+        </p:spPr>
+        <p:txBody>
+          <a:bodyPr wrap="square" rtlCol="0">
+            <a:spAutoFit/>
+          </a:bodyPr>
+          <a:lstStyle/>
+          <a:p>
+            <a:r>
+              <a:rPr lang="en-IN" dirty="0"/>
+              <a:t>Bullet</a:t>
+            </a:r>
+          </a:p>
+          <a:p>
+            <a:r>
+              <a:rPr lang="en-IN" dirty="0"/>
+              <a:t>details</a:t>
+            </a:r>
+          </a:p>
+        </p:txBody>
+      </p:sp>
+      <p:sp>
+        <p:nvSpPr>
+          <p:cNvPr id="6" name="head2">
+            <a:extLst>
+              <a:ext uri="{FF2B5EF4-FFF2-40B4-BE49-F238E27FC236}">
+                <a16:creationId xmlns:a16="http://schemas.microsoft.com/office/drawing/2014/main" id="{EC54FAE9-D0C9-4E6D-BD92-BE588E00A0E5}"/>
+              </a:ext>
+            </a:extLst>
+          </p:cNvPr>
+          <p:cNvSpPr txBox="1"/>
+          <p:nvPr/>
+        </p:nvSpPr>
+        <p:spPr>
+          <a:xfrm>
+            <a:off x="388238" y="3281321"/>
+            <a:ext cx="8583484" cy="646331"/>
+          </a:xfrm>
+          <a:prstGeom prst="rect">
+            <a:avLst/>
+          </a:prstGeom>
+          <a:noFill/>
+        </p:spPr>
+        <p:txBody>
+          <a:bodyPr wrap="square" rtlCol="0">
+            <a:spAutoFit/>
+          </a:bodyPr>
+          <a:lstStyle/>
+          <a:p>
+            <a:r>
+              <a:rPr lang="en-IN" sz="3600" dirty="0"/>
+              <a:t>Bullet head</a:t>
+            </a:r>
+            <a:endParaRPr lang="en-US" sz="3600" dirty="0"/>
+          </a:p>
+        </p:txBody>
+      </p:sp>
+      <p:sp>
+        <p:nvSpPr>
+          <p:cNvPr id="7" name="content3">
+            <a:extLst>
+              <a:ext uri="{FF2B5EF4-FFF2-40B4-BE49-F238E27FC236}">
+                <a16:creationId xmlns:a16="http://schemas.microsoft.com/office/drawing/2014/main" id="{BAB09B8F-FCBE-446C-89AD-F3E542DDA470}"/>
+              </a:ext>
+            </a:extLst>
+          </p:cNvPr>
+          <p:cNvSpPr txBox="1"/>
+          <p:nvPr/>
+        </p:nvSpPr>
+        <p:spPr>
+          <a:xfrm>
+            <a:off x="382842" y="5566061"/>
+            <a:ext cx="8583484" cy="646331"/>
+          </a:xfrm>
+          <a:prstGeom prst="rect">
+            <a:avLst/>
+          </a:prstGeom>
+          <a:noFill/>
+          <a:ln>
+            <a:solidFill>
+              <a:schemeClr val="bg1"/>
+            </a:solidFill>
+          </a:ln>
+        </p:spPr>
+        <p:txBody>
+          <a:bodyPr wrap="square" rtlCol="0">
+            <a:spAutoFit/>
+          </a:bodyPr>
+          <a:lstStyle/>
+          <a:p>
+            <a:r>
+              <a:rPr lang="en-IN" dirty="0"/>
+              <a:t>Bullet</a:t>
+            </a:r>
+          </a:p>
+          <a:p>
+            <a:r>
+              <a:rPr lang="en-IN" dirty="0"/>
+              <a:t>details</a:t>
+            </a:r>
+          </a:p>
+        </p:txBody>
+      </p:sp>
+      <p:sp>
+        <p:nvSpPr>
+          <p:cNvPr id="8" name="head3">
+            <a:extLst>
+              <a:ext uri="{FF2B5EF4-FFF2-40B4-BE49-F238E27FC236}">
+                <a16:creationId xmlns:a16="http://schemas.microsoft.com/office/drawing/2014/main" id="{7F46E3E4-B57E-4E3B-ABC9-C8472D45B500}"/>
+              </a:ext>
+            </a:extLst>
+          </p:cNvPr>
+          <p:cNvSpPr txBox="1"/>
+          <p:nvPr/>
+        </p:nvSpPr>
+        <p:spPr>
+          <a:xfrm>
+            <a:off x="388238" y="4900731"/>
+            <a:ext cx="8588880" cy="646331"/>
+          </a:xfrm>
+          <a:prstGeom prst="rect">
+            <a:avLst/>
+          </a:prstGeom>
+          <a:noFill/>
+        </p:spPr>
+        <p:txBody>
+          <a:bodyPr wrap="square" rtlCol="0">
+            <a:spAutoFit/>
+          </a:bodyPr>
+          <a:lstStyle/>
+          <a:p>
+            <a:r>
+              <a:rPr lang="en-IN" sz="3600" dirty="0"/>
+              <a:t>Bullet head</a:t>
+            </a:r>
+            <a:endParaRPr lang="en-US" sz="3600" dirty="0"/>
+          </a:p>
+        </p:txBody>
+      </p:sp>
+      <p:sp>
+        <p:nvSpPr>
+          <p:cNvPr id="4" name="subtopic">
             <a:extLst>
               <a:ext uri="{FF2B5EF4-FFF2-40B4-BE49-F238E27FC236}">
                 <a16:creationId xmlns:a16="http://schemas.microsoft.com/office/drawing/2014/main" id="{216BD8E4-BE8C-48D9-AFBB-D6093A341E66}"/>
@@ -3445,170 +3609,6 @@
               <a:rPr lang="en-IN" sz="3600" dirty="0"/>
               <a:t>Subpoint</a:t>
             </a:r>
-          </a:p>
-        </p:txBody>
-      </p:sp>
-      <p:sp>
-        <p:nvSpPr>
-          <p:cNvPr id="5" name="content2">
-            <a:extLst>
-              <a:ext uri="{FF2B5EF4-FFF2-40B4-BE49-F238E27FC236}">
-                <a16:creationId xmlns:a16="http://schemas.microsoft.com/office/drawing/2014/main" id="{0114294D-3C82-4496-9578-DE3D20CA1765}"/>
-              </a:ext>
-            </a:extLst>
-          </p:cNvPr>
-          <p:cNvSpPr txBox="1"/>
-          <p:nvPr/>
-        </p:nvSpPr>
-        <p:spPr>
-          <a:xfrm>
-            <a:off x="402712" y="3940580"/>
-            <a:ext cx="7855793" cy="646331"/>
-          </a:xfrm>
-          <a:prstGeom prst="rect">
-            <a:avLst/>
-          </a:prstGeom>
-          <a:noFill/>
-          <a:ln>
-            <a:solidFill>
-              <a:schemeClr val="bg1"/>
-            </a:solidFill>
-          </a:ln>
-        </p:spPr>
-        <p:txBody>
-          <a:bodyPr wrap="square" rtlCol="0">
-            <a:spAutoFit/>
-          </a:bodyPr>
-          <a:lstStyle/>
-          <a:p>
-            <a:r>
-              <a:rPr lang="en-IN" dirty="0"/>
-              <a:t>Bullet</a:t>
-            </a:r>
-          </a:p>
-          <a:p>
-            <a:r>
-              <a:rPr lang="en-IN" dirty="0"/>
-              <a:t>details</a:t>
-            </a:r>
-          </a:p>
-        </p:txBody>
-      </p:sp>
-      <p:sp>
-        <p:nvSpPr>
-          <p:cNvPr id="6" name="head2">
-            <a:extLst>
-              <a:ext uri="{FF2B5EF4-FFF2-40B4-BE49-F238E27FC236}">
-                <a16:creationId xmlns:a16="http://schemas.microsoft.com/office/drawing/2014/main" id="{EC54FAE9-D0C9-4E6D-BD92-BE588E00A0E5}"/>
-              </a:ext>
-            </a:extLst>
-          </p:cNvPr>
-          <p:cNvSpPr txBox="1"/>
-          <p:nvPr/>
-        </p:nvSpPr>
-        <p:spPr>
-          <a:xfrm>
-            <a:off x="388238" y="3281321"/>
-            <a:ext cx="7426229" cy="646331"/>
-          </a:xfrm>
-          <a:prstGeom prst="rect">
-            <a:avLst/>
-          </a:prstGeom>
-          <a:noFill/>
-        </p:spPr>
-        <p:txBody>
-          <a:bodyPr wrap="square" rtlCol="0">
-            <a:spAutoFit/>
-          </a:bodyPr>
-          <a:lstStyle/>
-          <a:p>
-            <a:r>
-              <a:rPr lang="en-IN" sz="3600" dirty="0"/>
-              <a:t>Bullet head</a:t>
-            </a:r>
-            <a:endParaRPr lang="en-US" sz="3600" dirty="0"/>
-          </a:p>
-        </p:txBody>
-      </p:sp>
-      <p:sp>
-        <p:nvSpPr>
-          <p:cNvPr id="7" name="content3">
-            <a:extLst>
-              <a:ext uri="{FF2B5EF4-FFF2-40B4-BE49-F238E27FC236}">
-                <a16:creationId xmlns:a16="http://schemas.microsoft.com/office/drawing/2014/main" id="{BAB09B8F-FCBE-446C-89AD-F3E542DDA470}"/>
-              </a:ext>
-            </a:extLst>
-          </p:cNvPr>
-          <p:cNvSpPr txBox="1"/>
-          <p:nvPr/>
-        </p:nvSpPr>
-        <p:spPr>
-          <a:xfrm>
-            <a:off x="382842" y="5566061"/>
-            <a:ext cx="7855793" cy="646331"/>
-          </a:xfrm>
-          <a:prstGeom prst="rect">
-            <a:avLst/>
-          </a:prstGeom>
-          <a:noFill/>
-          <a:ln>
-            <a:solidFill>
-              <a:schemeClr val="bg1"/>
-            </a:solidFill>
-          </a:ln>
-        </p:spPr>
-        <p:txBody>
-          <a:bodyPr wrap="square" rtlCol="0">
-            <a:spAutoFit/>
-          </a:bodyPr>
-          <a:lstStyle/>
-          <a:p>
-            <a:r>
-              <a:rPr lang="en-IN" dirty="0"/>
-              <a:t>Bullet</a:t>
-            </a:r>
-          </a:p>
-          <a:p>
-            <a:r>
-              <a:rPr lang="en-IN" dirty="0"/>
-              <a:t>details</a:t>
-            </a:r>
-          </a:p>
-        </p:txBody>
-      </p:sp>
-      <p:sp>
-        <p:nvSpPr>
-          <p:cNvPr id="8" name="head3">
-            <a:extLst>
-              <a:ext uri="{FF2B5EF4-FFF2-40B4-BE49-F238E27FC236}">
-                <a16:creationId xmlns:a16="http://schemas.microsoft.com/office/drawing/2014/main" id="{7F46E3E4-B57E-4E3B-ABC9-C8472D45B500}"/>
-              </a:ext>
-            </a:extLst>
-          </p:cNvPr>
-          <p:cNvSpPr txBox="1"/>
-          <p:nvPr/>
-        </p:nvSpPr>
-        <p:spPr>
-          <a:xfrm>
-            <a:off x="388238" y="4900731"/>
-            <a:ext cx="7426229" cy="646331"/>
-          </a:xfrm>
-          <a:prstGeom prst="rect">
-            <a:avLst/>
-          </a:prstGeom>
-          <a:noFill/>
-        </p:spPr>
-        <p:txBody>
-          <a:bodyPr wrap="square" rtlCol="0">
-            <a:spAutoFit/>
-          </a:bodyPr>
-          <a:lstStyle/>
-          <a:p>
-            <a:r>
-              <a:rPr lang="en-IN" sz="3600" dirty="0"/>
-              <a:t>Bullet head</a:t>
-            </a:r>
-            <a:endParaRPr lang="en-US" sz="3600" dirty="0"/>
           </a:p>
         </p:txBody>
       </p:sp>
